--- a/prezentace/1. ročník/05 - počítačové sítě a internet.pptx
+++ b/prezentace/1. ročník/05 - počítačové sítě a internet.pptx
@@ -125,8 +125,7 @@
 <file path=ppt/revisionInfo.xml><?xml version="1.0" encoding="utf-8"?>
 <p1510:revInfo xmlns:a="http://schemas.openxmlformats.org/drawingml/2006/main" xmlns:r="http://schemas.openxmlformats.org/officeDocument/2006/relationships" xmlns:p1510="http://schemas.microsoft.com/office/powerpoint/2015/10/main">
   <p1510:revLst>
-    <p1510:client id="{9320EE62-74E3-4CCA-95E0-27E2C449C5BE}" v="17" dt="2025-11-09T19:48:16.350"/>
-    <p1510:client id="{D9F816FA-F394-458A-A7CF-7E4724D7FB85}" v="925" dt="2025-11-09T19:44:40.017"/>
+    <p1510:client id="{2BB3B627-048E-4502-873E-CABE356481A1}" v="3" dt="2025-11-18T15:52:26.533"/>
   </p1510:revLst>
 </p1510:revInfo>
 </file>
@@ -140,6 +139,54 @@
       <pc:docMkLst>
         <pc:docMk/>
       </pc:docMkLst>
+    </pc:docChg>
+  </pc:docChgLst>
+  <pc:docChgLst>
+    <pc:chgData name="Sládeček David" userId="S::sladecek@hradebni.cz::474d93f0-3a32-49cc-b837-47806091b590" providerId="AD" clId="Web-{2BB3B627-048E-4502-873E-CABE356481A1}"/>
+    <pc:docChg chg="modSld">
+      <pc:chgData name="Sládeček David" userId="S::sladecek@hradebni.cz::474d93f0-3a32-49cc-b837-47806091b590" providerId="AD" clId="Web-{2BB3B627-048E-4502-873E-CABE356481A1}" dt="2025-11-18T15:52:24.048" v="1" actId="20577"/>
+      <pc:docMkLst>
+        <pc:docMk/>
+      </pc:docMkLst>
+      <pc:sldChg chg="modSp">
+        <pc:chgData name="Sládeček David" userId="S::sladecek@hradebni.cz::474d93f0-3a32-49cc-b837-47806091b590" providerId="AD" clId="Web-{2BB3B627-048E-4502-873E-CABE356481A1}" dt="2025-11-18T15:52:24.048" v="1" actId="20577"/>
+        <pc:sldMkLst>
+          <pc:docMk/>
+          <pc:sldMk cId="3317666236" sldId="259"/>
+        </pc:sldMkLst>
+        <pc:spChg chg="mod">
+          <ac:chgData name="Sládeček David" userId="S::sladecek@hradebni.cz::474d93f0-3a32-49cc-b837-47806091b590" providerId="AD" clId="Web-{2BB3B627-048E-4502-873E-CABE356481A1}" dt="2025-11-18T15:52:24.048" v="1" actId="20577"/>
+          <ac:spMkLst>
+            <pc:docMk/>
+            <pc:sldMk cId="3317666236" sldId="259"/>
+            <ac:spMk id="3" creationId="{7D4DCCD2-7A5C-274D-8376-F9954AAB7483}"/>
+          </ac:spMkLst>
+        </pc:spChg>
+      </pc:sldChg>
+    </pc:docChg>
+  </pc:docChgLst>
+  <pc:docChgLst>
+    <pc:chgData name="Sládeček David" userId="S::sladecek@hradebni.cz::474d93f0-3a32-49cc-b837-47806091b590" providerId="AD" clId="Web-{94798EA8-8133-4672-AC39-CD7292FE54E0}"/>
+    <pc:docChg chg="modSld">
+      <pc:chgData name="Sládeček David" userId="S::sladecek@hradebni.cz::474d93f0-3a32-49cc-b837-47806091b590" providerId="AD" clId="Web-{94798EA8-8133-4672-AC39-CD7292FE54E0}" dt="2025-11-10T07:43:05.647" v="7" actId="20577"/>
+      <pc:docMkLst>
+        <pc:docMk/>
+      </pc:docMkLst>
+      <pc:sldChg chg="modSp">
+        <pc:chgData name="Sládeček David" userId="S::sladecek@hradebni.cz::474d93f0-3a32-49cc-b837-47806091b590" providerId="AD" clId="Web-{94798EA8-8133-4672-AC39-CD7292FE54E0}" dt="2025-11-10T07:43:05.647" v="7" actId="20577"/>
+        <pc:sldMkLst>
+          <pc:docMk/>
+          <pc:sldMk cId="3903226095" sldId="263"/>
+        </pc:sldMkLst>
+        <pc:spChg chg="mod">
+          <ac:chgData name="Sládeček David" userId="S::sladecek@hradebni.cz::474d93f0-3a32-49cc-b837-47806091b590" providerId="AD" clId="Web-{94798EA8-8133-4672-AC39-CD7292FE54E0}" dt="2025-11-10T07:43:05.647" v="7" actId="20577"/>
+          <ac:spMkLst>
+            <pc:docMk/>
+            <pc:sldMk cId="3903226095" sldId="263"/>
+            <ac:spMk id="3" creationId="{CD855492-873A-E1FC-B57B-F03B9AF69CE2}"/>
+          </ac:spMkLst>
+        </pc:spChg>
+      </pc:sldChg>
     </pc:docChg>
   </pc:docChgLst>
   <pc:docChgLst>
@@ -173,13 +220,6 @@
           </ac:spMkLst>
         </pc:spChg>
       </pc:sldChg>
-      <pc:sldChg chg="del">
-        <pc:chgData name="Sládeček David" userId="S::sladecek@hradebni.cz::474d93f0-3a32-49cc-b837-47806091b590" providerId="AD" clId="Web-{D9F816FA-F394-458A-A7CF-7E4724D7FB85}" dt="2025-11-09T19:14:42.318" v="22"/>
-        <pc:sldMkLst>
-          <pc:docMk/>
-          <pc:sldMk cId="132132024" sldId="257"/>
-        </pc:sldMkLst>
-      </pc:sldChg>
       <pc:sldChg chg="addSp delSp modSp new mod setBg">
         <pc:chgData name="Sládeček David" userId="S::sladecek@hradebni.cz::474d93f0-3a32-49cc-b837-47806091b590" providerId="AD" clId="Web-{D9F816FA-F394-458A-A7CF-7E4724D7FB85}" dt="2025-11-09T19:23:44.218" v="277" actId="20577"/>
         <pc:sldMkLst>
@@ -202,110 +242,6 @@
             <ac:spMk id="3" creationId="{026EF9B7-A28A-7BE2-55F7-2318405507D3}"/>
           </ac:spMkLst>
         </pc:spChg>
-        <pc:spChg chg="add del">
-          <ac:chgData name="Sládeček David" userId="S::sladecek@hradebni.cz::474d93f0-3a32-49cc-b837-47806091b590" providerId="AD" clId="Web-{D9F816FA-F394-458A-A7CF-7E4724D7FB85}" dt="2025-11-09T19:22:25.092" v="264"/>
-          <ac:spMkLst>
-            <pc:docMk/>
-            <pc:sldMk cId="2123910099" sldId="257"/>
-            <ac:spMk id="9" creationId="{990D0034-F768-41E7-85D4-F38C4DE85770}"/>
-          </ac:spMkLst>
-        </pc:spChg>
-        <pc:spChg chg="add del">
-          <ac:chgData name="Sládeček David" userId="S::sladecek@hradebni.cz::474d93f0-3a32-49cc-b837-47806091b590" providerId="AD" clId="Web-{D9F816FA-F394-458A-A7CF-7E4724D7FB85}" dt="2025-11-09T19:22:25.092" v="264"/>
-          <ac:spMkLst>
-            <pc:docMk/>
-            <pc:sldMk cId="2123910099" sldId="257"/>
-            <ac:spMk id="11" creationId="{C4F7E42D-8B5A-4FC8-81CD-9E60171F7FA8}"/>
-          </ac:spMkLst>
-        </pc:spChg>
-        <pc:spChg chg="add del">
-          <ac:chgData name="Sládeček David" userId="S::sladecek@hradebni.cz::474d93f0-3a32-49cc-b837-47806091b590" providerId="AD" clId="Web-{D9F816FA-F394-458A-A7CF-7E4724D7FB85}" dt="2025-11-09T19:22:25.092" v="264"/>
-          <ac:spMkLst>
-            <pc:docMk/>
-            <pc:sldMk cId="2123910099" sldId="257"/>
-            <ac:spMk id="13" creationId="{8C04651D-B9F4-4935-A02D-364153FBDF54}"/>
-          </ac:spMkLst>
-        </pc:spChg>
-        <pc:spChg chg="add del">
-          <ac:chgData name="Sládeček David" userId="S::sladecek@hradebni.cz::474d93f0-3a32-49cc-b837-47806091b590" providerId="AD" clId="Web-{D9F816FA-F394-458A-A7CF-7E4724D7FB85}" dt="2025-11-09T19:22:42.592" v="266"/>
-          <ac:spMkLst>
-            <pc:docMk/>
-            <pc:sldMk cId="2123910099" sldId="257"/>
-            <ac:spMk id="15" creationId="{311973C2-EB8B-452A-A698-4A252FD3AE28}"/>
-          </ac:spMkLst>
-        </pc:spChg>
-        <pc:spChg chg="add del">
-          <ac:chgData name="Sládeček David" userId="S::sladecek@hradebni.cz::474d93f0-3a32-49cc-b837-47806091b590" providerId="AD" clId="Web-{D9F816FA-F394-458A-A7CF-7E4724D7FB85}" dt="2025-11-09T19:22:42.592" v="266"/>
-          <ac:spMkLst>
-            <pc:docMk/>
-            <pc:sldMk cId="2123910099" sldId="257"/>
-            <ac:spMk id="16" creationId="{10162E77-11AD-44A7-84EC-40C59EEFBD2E}"/>
-          </ac:spMkLst>
-        </pc:spChg>
-        <pc:spChg chg="add del">
-          <ac:chgData name="Sládeček David" userId="S::sladecek@hradebni.cz::474d93f0-3a32-49cc-b837-47806091b590" providerId="AD" clId="Web-{D9F816FA-F394-458A-A7CF-7E4724D7FB85}" dt="2025-11-09T19:22:56.811" v="270"/>
-          <ac:spMkLst>
-            <pc:docMk/>
-            <pc:sldMk cId="2123910099" sldId="257"/>
-            <ac:spMk id="20" creationId="{990D0034-F768-41E7-85D4-F38C4DE85770}"/>
-          </ac:spMkLst>
-        </pc:spChg>
-        <pc:spChg chg="add del">
-          <ac:chgData name="Sládeček David" userId="S::sladecek@hradebni.cz::474d93f0-3a32-49cc-b837-47806091b590" providerId="AD" clId="Web-{D9F816FA-F394-458A-A7CF-7E4724D7FB85}" dt="2025-11-09T19:22:56.811" v="270"/>
-          <ac:spMkLst>
-            <pc:docMk/>
-            <pc:sldMk cId="2123910099" sldId="257"/>
-            <ac:spMk id="21" creationId="{C4F7E42D-8B5A-4FC8-81CD-9E60171F7FA8}"/>
-          </ac:spMkLst>
-        </pc:spChg>
-        <pc:spChg chg="add del">
-          <ac:chgData name="Sládeček David" userId="S::sladecek@hradebni.cz::474d93f0-3a32-49cc-b837-47806091b590" providerId="AD" clId="Web-{D9F816FA-F394-458A-A7CF-7E4724D7FB85}" dt="2025-11-09T19:22:56.811" v="270"/>
-          <ac:spMkLst>
-            <pc:docMk/>
-            <pc:sldMk cId="2123910099" sldId="257"/>
-            <ac:spMk id="23" creationId="{8C04651D-B9F4-4935-A02D-364153FBDF54}"/>
-          </ac:spMkLst>
-        </pc:spChg>
-        <pc:spChg chg="add">
-          <ac:chgData name="Sládeček David" userId="S::sladecek@hradebni.cz::474d93f0-3a32-49cc-b837-47806091b590" providerId="AD" clId="Web-{D9F816FA-F394-458A-A7CF-7E4724D7FB85}" dt="2025-11-09T19:22:56.811" v="270"/>
-          <ac:spMkLst>
-            <pc:docMk/>
-            <pc:sldMk cId="2123910099" sldId="257"/>
-            <ac:spMk id="28" creationId="{5CF81D86-BDBA-477C-B7DD-8D359BB9965B}"/>
-          </ac:spMkLst>
-        </pc:spChg>
-        <pc:spChg chg="add">
-          <ac:chgData name="Sládeček David" userId="S::sladecek@hradebni.cz::474d93f0-3a32-49cc-b837-47806091b590" providerId="AD" clId="Web-{D9F816FA-F394-458A-A7CF-7E4724D7FB85}" dt="2025-11-09T19:22:56.811" v="270"/>
-          <ac:spMkLst>
-            <pc:docMk/>
-            <pc:sldMk cId="2123910099" sldId="257"/>
-            <ac:spMk id="32" creationId="{88AA064E-5F6E-4024-BC28-EDDC3DFC70E1}"/>
-          </ac:spMkLst>
-        </pc:spChg>
-        <pc:spChg chg="add">
-          <ac:chgData name="Sládeček David" userId="S::sladecek@hradebni.cz::474d93f0-3a32-49cc-b837-47806091b590" providerId="AD" clId="Web-{D9F816FA-F394-458A-A7CF-7E4724D7FB85}" dt="2025-11-09T19:22:56.811" v="270"/>
-          <ac:spMkLst>
-            <pc:docMk/>
-            <pc:sldMk cId="2123910099" sldId="257"/>
-            <ac:spMk id="34" creationId="{03B29638-4838-4B9B-B9DB-96E542BAF3E6}"/>
-          </ac:spMkLst>
-        </pc:spChg>
-        <pc:picChg chg="add del">
-          <ac:chgData name="Sládeček David" userId="S::sladecek@hradebni.cz::474d93f0-3a32-49cc-b837-47806091b590" providerId="AD" clId="Web-{D9F816FA-F394-458A-A7CF-7E4724D7FB85}" dt="2025-11-09T19:22:25.092" v="264"/>
-          <ac:picMkLst>
-            <pc:docMk/>
-            <pc:sldMk cId="2123910099" sldId="257"/>
-            <ac:picMk id="5" creationId="{264A36DE-62D4-EBB1-6B23-78F9AC2E9669}"/>
-          </ac:picMkLst>
-        </pc:picChg>
-        <pc:picChg chg="add del">
-          <ac:chgData name="Sládeček David" userId="S::sladecek@hradebni.cz::474d93f0-3a32-49cc-b837-47806091b590" providerId="AD" clId="Web-{D9F816FA-F394-458A-A7CF-7E4724D7FB85}" dt="2025-11-09T19:22:42.592" v="266"/>
-          <ac:picMkLst>
-            <pc:docMk/>
-            <pc:sldMk cId="2123910099" sldId="257"/>
-            <ac:picMk id="17" creationId="{C6B5C8A5-86F6-8929-2327-1133AF6548D5}"/>
-          </ac:picMkLst>
-        </pc:picChg>
         <pc:picChg chg="add mod modCrop">
           <ac:chgData name="Sládeček David" userId="S::sladecek@hradebni.cz::474d93f0-3a32-49cc-b837-47806091b590" providerId="AD" clId="Web-{D9F816FA-F394-458A-A7CF-7E4724D7FB85}" dt="2025-11-09T19:23:23.749" v="274"/>
           <ac:picMkLst>
@@ -314,29 +250,6 @@
             <ac:picMk id="22" creationId="{264A36DE-62D4-EBB1-6B23-78F9AC2E9669}"/>
           </ac:picMkLst>
         </pc:picChg>
-        <pc:cxnChg chg="add del">
-          <ac:chgData name="Sládeček David" userId="S::sladecek@hradebni.cz::474d93f0-3a32-49cc-b837-47806091b590" providerId="AD" clId="Web-{D9F816FA-F394-458A-A7CF-7E4724D7FB85}" dt="2025-11-09T19:22:42.592" v="266"/>
-          <ac:cxnSpMkLst>
-            <pc:docMk/>
-            <pc:sldMk cId="2123910099" sldId="257"/>
-            <ac:cxnSpMk id="18" creationId="{5AB158E9-1B40-4CD6-95F0-95CA11DF7B7A}"/>
-          </ac:cxnSpMkLst>
-        </pc:cxnChg>
-        <pc:cxnChg chg="add">
-          <ac:chgData name="Sládeček David" userId="S::sladecek@hradebni.cz::474d93f0-3a32-49cc-b837-47806091b590" providerId="AD" clId="Web-{D9F816FA-F394-458A-A7CF-7E4724D7FB85}" dt="2025-11-09T19:22:56.811" v="270"/>
-          <ac:cxnSpMkLst>
-            <pc:docMk/>
-            <pc:sldMk cId="2123910099" sldId="257"/>
-            <ac:cxnSpMk id="30" creationId="{C65F3E9C-EF11-4F8F-A621-399C7A3E6401}"/>
-          </ac:cxnSpMkLst>
-        </pc:cxnChg>
-      </pc:sldChg>
-      <pc:sldChg chg="del">
-        <pc:chgData name="Sládeček David" userId="S::sladecek@hradebni.cz::474d93f0-3a32-49cc-b837-47806091b590" providerId="AD" clId="Web-{D9F816FA-F394-458A-A7CF-7E4724D7FB85}" dt="2025-11-09T19:14:41.536" v="21"/>
-        <pc:sldMkLst>
-          <pc:docMk/>
-          <pc:sldMk cId="1292085216" sldId="258"/>
-        </pc:sldMkLst>
       </pc:sldChg>
       <pc:sldChg chg="addSp delSp modSp new mod setBg">
         <pc:chgData name="Sládeček David" userId="S::sladecek@hradebni.cz::474d93f0-3a32-49cc-b837-47806091b590" providerId="AD" clId="Web-{D9F816FA-F394-458A-A7CF-7E4724D7FB85}" dt="2025-11-09T19:28:29.126" v="466" actId="20577"/>
@@ -360,134 +273,6 @@
             <ac:spMk id="3" creationId="{B6BEAE7B-19E2-78D5-E24D-1932169A0AC8}"/>
           </ac:spMkLst>
         </pc:spChg>
-        <pc:spChg chg="add del">
-          <ac:chgData name="Sládeček David" userId="S::sladecek@hradebni.cz::474d93f0-3a32-49cc-b837-47806091b590" providerId="AD" clId="Web-{D9F816FA-F394-458A-A7CF-7E4724D7FB85}" dt="2025-11-09T19:27:24.419" v="441"/>
-          <ac:spMkLst>
-            <pc:docMk/>
-            <pc:sldMk cId="3496295207" sldId="258"/>
-            <ac:spMk id="9" creationId="{311973C2-EB8B-452A-A698-4A252FD3AE28}"/>
-          </ac:spMkLst>
-        </pc:spChg>
-        <pc:spChg chg="add del">
-          <ac:chgData name="Sládeček David" userId="S::sladecek@hradebni.cz::474d93f0-3a32-49cc-b837-47806091b590" providerId="AD" clId="Web-{D9F816FA-F394-458A-A7CF-7E4724D7FB85}" dt="2025-11-09T19:27:24.419" v="441"/>
-          <ac:spMkLst>
-            <pc:docMk/>
-            <pc:sldMk cId="3496295207" sldId="258"/>
-            <ac:spMk id="11" creationId="{10162E77-11AD-44A7-84EC-40C59EEFBD2E}"/>
-          </ac:spMkLst>
-        </pc:spChg>
-        <pc:spChg chg="add del">
-          <ac:chgData name="Sládeček David" userId="S::sladecek@hradebni.cz::474d93f0-3a32-49cc-b837-47806091b590" providerId="AD" clId="Web-{D9F816FA-F394-458A-A7CF-7E4724D7FB85}" dt="2025-11-09T19:27:50.092" v="450"/>
-          <ac:spMkLst>
-            <pc:docMk/>
-            <pc:sldMk cId="3496295207" sldId="258"/>
-            <ac:spMk id="15" creationId="{E32D3FD4-6F71-43DF-93B9-87279519C618}"/>
-          </ac:spMkLst>
-        </pc:spChg>
-        <pc:spChg chg="add del">
-          <ac:chgData name="Sládeček David" userId="S::sladecek@hradebni.cz::474d93f0-3a32-49cc-b837-47806091b590" providerId="AD" clId="Web-{D9F816FA-F394-458A-A7CF-7E4724D7FB85}" dt="2025-11-09T19:27:50.092" v="450"/>
-          <ac:spMkLst>
-            <pc:docMk/>
-            <pc:sldMk cId="3496295207" sldId="258"/>
-            <ac:spMk id="16" creationId="{36F207B4-66C3-4A76-8D54-C2871CF80983}"/>
-          </ac:spMkLst>
-        </pc:spChg>
-        <pc:spChg chg="add del">
-          <ac:chgData name="Sládeček David" userId="S::sladecek@hradebni.cz::474d93f0-3a32-49cc-b837-47806091b590" providerId="AD" clId="Web-{D9F816FA-F394-458A-A7CF-7E4724D7FB85}" dt="2025-11-09T19:27:44.764" v="445"/>
-          <ac:spMkLst>
-            <pc:docMk/>
-            <pc:sldMk cId="3496295207" sldId="258"/>
-            <ac:spMk id="22" creationId="{52ABB703-2B0E-4C3B-B4A2-F3973548E561}"/>
-          </ac:spMkLst>
-        </pc:spChg>
-        <pc:spChg chg="add del">
-          <ac:chgData name="Sládeček David" userId="S::sladecek@hradebni.cz::474d93f0-3a32-49cc-b837-47806091b590" providerId="AD" clId="Web-{D9F816FA-F394-458A-A7CF-7E4724D7FB85}" dt="2025-11-09T19:27:44.764" v="445"/>
-          <ac:spMkLst>
-            <pc:docMk/>
-            <pc:sldMk cId="3496295207" sldId="258"/>
-            <ac:spMk id="26" creationId="{E95DA498-D9A2-4DA9-B9DA-B3776E08CF7E}"/>
-          </ac:spMkLst>
-        </pc:spChg>
-        <pc:spChg chg="add del">
-          <ac:chgData name="Sládeček David" userId="S::sladecek@hradebni.cz::474d93f0-3a32-49cc-b837-47806091b590" providerId="AD" clId="Web-{D9F816FA-F394-458A-A7CF-7E4724D7FB85}" dt="2025-11-09T19:27:44.764" v="445"/>
-          <ac:spMkLst>
-            <pc:docMk/>
-            <pc:sldMk cId="3496295207" sldId="258"/>
-            <ac:spMk id="28" creationId="{82A73093-4B9D-420D-B17E-52293703A1D4}"/>
-          </ac:spMkLst>
-        </pc:spChg>
-        <pc:spChg chg="add del">
-          <ac:chgData name="Sládeček David" userId="S::sladecek@hradebni.cz::474d93f0-3a32-49cc-b837-47806091b590" providerId="AD" clId="Web-{D9F816FA-F394-458A-A7CF-7E4724D7FB85}" dt="2025-11-09T19:27:47.436" v="447"/>
-          <ac:spMkLst>
-            <pc:docMk/>
-            <pc:sldMk cId="3496295207" sldId="258"/>
-            <ac:spMk id="30" creationId="{5CF81D86-BDBA-477C-B7DD-8D359BB9965B}"/>
-          </ac:spMkLst>
-        </pc:spChg>
-        <pc:spChg chg="add del">
-          <ac:chgData name="Sládeček David" userId="S::sladecek@hradebni.cz::474d93f0-3a32-49cc-b837-47806091b590" providerId="AD" clId="Web-{D9F816FA-F394-458A-A7CF-7E4724D7FB85}" dt="2025-11-09T19:27:47.436" v="447"/>
-          <ac:spMkLst>
-            <pc:docMk/>
-            <pc:sldMk cId="3496295207" sldId="258"/>
-            <ac:spMk id="32" creationId="{88AA064E-5F6E-4024-BC28-EDDC3DFC70E1}"/>
-          </ac:spMkLst>
-        </pc:spChg>
-        <pc:spChg chg="add del">
-          <ac:chgData name="Sládeček David" userId="S::sladecek@hradebni.cz::474d93f0-3a32-49cc-b837-47806091b590" providerId="AD" clId="Web-{D9F816FA-F394-458A-A7CF-7E4724D7FB85}" dt="2025-11-09T19:27:47.436" v="447"/>
-          <ac:spMkLst>
-            <pc:docMk/>
-            <pc:sldMk cId="3496295207" sldId="258"/>
-            <ac:spMk id="33" creationId="{03B29638-4838-4B9B-B9DB-96E542BAF3E6}"/>
-          </ac:spMkLst>
-        </pc:spChg>
-        <pc:spChg chg="add del">
-          <ac:chgData name="Sládeček David" userId="S::sladecek@hradebni.cz::474d93f0-3a32-49cc-b837-47806091b590" providerId="AD" clId="Web-{D9F816FA-F394-458A-A7CF-7E4724D7FB85}" dt="2025-11-09T19:27:50.077" v="449"/>
-          <ac:spMkLst>
-            <pc:docMk/>
-            <pc:sldMk cId="3496295207" sldId="258"/>
-            <ac:spMk id="35" creationId="{311973C2-EB8B-452A-A698-4A252FD3AE28}"/>
-          </ac:spMkLst>
-        </pc:spChg>
-        <pc:spChg chg="add del">
-          <ac:chgData name="Sládeček David" userId="S::sladecek@hradebni.cz::474d93f0-3a32-49cc-b837-47806091b590" providerId="AD" clId="Web-{D9F816FA-F394-458A-A7CF-7E4724D7FB85}" dt="2025-11-09T19:27:50.077" v="449"/>
-          <ac:spMkLst>
-            <pc:docMk/>
-            <pc:sldMk cId="3496295207" sldId="258"/>
-            <ac:spMk id="36" creationId="{10162E77-11AD-44A7-84EC-40C59EEFBD2E}"/>
-          </ac:spMkLst>
-        </pc:spChg>
-        <pc:spChg chg="add del">
-          <ac:chgData name="Sládeček David" userId="S::sladecek@hradebni.cz::474d93f0-3a32-49cc-b837-47806091b590" providerId="AD" clId="Web-{D9F816FA-F394-458A-A7CF-7E4724D7FB85}" dt="2025-11-09T19:28:18.078" v="464"/>
-          <ac:spMkLst>
-            <pc:docMk/>
-            <pc:sldMk cId="3496295207" sldId="258"/>
-            <ac:spMk id="39" creationId="{5CF81D86-BDBA-477C-B7DD-8D359BB9965B}"/>
-          </ac:spMkLst>
-        </pc:spChg>
-        <pc:spChg chg="add del">
-          <ac:chgData name="Sládeček David" userId="S::sladecek@hradebni.cz::474d93f0-3a32-49cc-b837-47806091b590" providerId="AD" clId="Web-{D9F816FA-F394-458A-A7CF-7E4724D7FB85}" dt="2025-11-09T19:28:18.078" v="464"/>
-          <ac:spMkLst>
-            <pc:docMk/>
-            <pc:sldMk cId="3496295207" sldId="258"/>
-            <ac:spMk id="41" creationId="{88AA064E-5F6E-4024-BC28-EDDC3DFC70E1}"/>
-          </ac:spMkLst>
-        </pc:spChg>
-        <pc:spChg chg="add del">
-          <ac:chgData name="Sládeček David" userId="S::sladecek@hradebni.cz::474d93f0-3a32-49cc-b837-47806091b590" providerId="AD" clId="Web-{D9F816FA-F394-458A-A7CF-7E4724D7FB85}" dt="2025-11-09T19:28:18.078" v="464"/>
-          <ac:spMkLst>
-            <pc:docMk/>
-            <pc:sldMk cId="3496295207" sldId="258"/>
-            <ac:spMk id="42" creationId="{03B29638-4838-4B9B-B9DB-96E542BAF3E6}"/>
-          </ac:spMkLst>
-        </pc:spChg>
-        <pc:picChg chg="add del">
-          <ac:chgData name="Sládeček David" userId="S::sladecek@hradebni.cz::474d93f0-3a32-49cc-b837-47806091b590" providerId="AD" clId="Web-{D9F816FA-F394-458A-A7CF-7E4724D7FB85}" dt="2025-11-09T19:27:24.419" v="441"/>
-          <ac:picMkLst>
-            <pc:docMk/>
-            <pc:sldMk cId="3496295207" sldId="258"/>
-            <ac:picMk id="5" creationId="{246B45D4-F69E-59A6-89B8-0F8DBBA6ACC5}"/>
-          </ac:picMkLst>
-        </pc:picChg>
         <pc:picChg chg="add mod ord">
           <ac:chgData name="Sládeček David" userId="S::sladecek@hradebni.cz::474d93f0-3a32-49cc-b837-47806091b590" providerId="AD" clId="Web-{D9F816FA-F394-458A-A7CF-7E4724D7FB85}" dt="2025-11-09T19:28:18.078" v="464"/>
           <ac:picMkLst>
@@ -496,53 +281,6 @@
             <ac:picMk id="17" creationId="{534A6737-A813-30BC-F2BC-7495AAD8D5CB}"/>
           </ac:picMkLst>
         </pc:picChg>
-        <pc:cxnChg chg="add del">
-          <ac:chgData name="Sládeček David" userId="S::sladecek@hradebni.cz::474d93f0-3a32-49cc-b837-47806091b590" providerId="AD" clId="Web-{D9F816FA-F394-458A-A7CF-7E4724D7FB85}" dt="2025-11-09T19:27:24.419" v="441"/>
-          <ac:cxnSpMkLst>
-            <pc:docMk/>
-            <pc:sldMk cId="3496295207" sldId="258"/>
-            <ac:cxnSpMk id="13" creationId="{5AB158E9-1B40-4CD6-95F0-95CA11DF7B7A}"/>
-          </ac:cxnSpMkLst>
-        </pc:cxnChg>
-        <pc:cxnChg chg="add del">
-          <ac:chgData name="Sládeček David" userId="S::sladecek@hradebni.cz::474d93f0-3a32-49cc-b837-47806091b590" providerId="AD" clId="Web-{D9F816FA-F394-458A-A7CF-7E4724D7FB85}" dt="2025-11-09T19:27:44.764" v="445"/>
-          <ac:cxnSpMkLst>
-            <pc:docMk/>
-            <pc:sldMk cId="3496295207" sldId="258"/>
-            <ac:cxnSpMk id="24" creationId="{9C21570E-E159-49A6-9891-FA397B7A92D3}"/>
-          </ac:cxnSpMkLst>
-        </pc:cxnChg>
-        <pc:cxnChg chg="add del">
-          <ac:chgData name="Sládeček David" userId="S::sladecek@hradebni.cz::474d93f0-3a32-49cc-b837-47806091b590" providerId="AD" clId="Web-{D9F816FA-F394-458A-A7CF-7E4724D7FB85}" dt="2025-11-09T19:27:47.436" v="447"/>
-          <ac:cxnSpMkLst>
-            <pc:docMk/>
-            <pc:sldMk cId="3496295207" sldId="258"/>
-            <ac:cxnSpMk id="31" creationId="{C65F3E9C-EF11-4F8F-A621-399C7A3E6401}"/>
-          </ac:cxnSpMkLst>
-        </pc:cxnChg>
-        <pc:cxnChg chg="add del">
-          <ac:chgData name="Sládeček David" userId="S::sladecek@hradebni.cz::474d93f0-3a32-49cc-b837-47806091b590" providerId="AD" clId="Web-{D9F816FA-F394-458A-A7CF-7E4724D7FB85}" dt="2025-11-09T19:27:50.077" v="449"/>
-          <ac:cxnSpMkLst>
-            <pc:docMk/>
-            <pc:sldMk cId="3496295207" sldId="258"/>
-            <ac:cxnSpMk id="37" creationId="{5AB158E9-1B40-4CD6-95F0-95CA11DF7B7A}"/>
-          </ac:cxnSpMkLst>
-        </pc:cxnChg>
-        <pc:cxnChg chg="add del">
-          <ac:chgData name="Sládeček David" userId="S::sladecek@hradebni.cz::474d93f0-3a32-49cc-b837-47806091b590" providerId="AD" clId="Web-{D9F816FA-F394-458A-A7CF-7E4724D7FB85}" dt="2025-11-09T19:28:18.078" v="464"/>
-          <ac:cxnSpMkLst>
-            <pc:docMk/>
-            <pc:sldMk cId="3496295207" sldId="258"/>
-            <ac:cxnSpMk id="40" creationId="{C65F3E9C-EF11-4F8F-A621-399C7A3E6401}"/>
-          </ac:cxnSpMkLst>
-        </pc:cxnChg>
-      </pc:sldChg>
-      <pc:sldChg chg="del">
-        <pc:chgData name="Sládeček David" userId="S::sladecek@hradebni.cz::474d93f0-3a32-49cc-b837-47806091b590" providerId="AD" clId="Web-{D9F816FA-F394-458A-A7CF-7E4724D7FB85}" dt="2025-11-09T19:14:40.692" v="20"/>
-        <pc:sldMkLst>
-          <pc:docMk/>
-          <pc:sldMk cId="2684473371" sldId="259"/>
-        </pc:sldMkLst>
       </pc:sldChg>
       <pc:sldChg chg="addSp delSp modSp new mod setBg">
         <pc:chgData name="Sládeček David" userId="S::sladecek@hradebni.cz::474d93f0-3a32-49cc-b837-47806091b590" providerId="AD" clId="Web-{D9F816FA-F394-458A-A7CF-7E4724D7FB85}" dt="2025-11-09T19:34:19.403" v="739" actId="20577"/>
@@ -566,22 +304,6 @@
             <ac:spMk id="3" creationId="{7D4DCCD2-7A5C-274D-8376-F9954AAB7483}"/>
           </ac:spMkLst>
         </pc:spChg>
-        <pc:spChg chg="add del">
-          <ac:chgData name="Sládeček David" userId="S::sladecek@hradebni.cz::474d93f0-3a32-49cc-b837-47806091b590" providerId="AD" clId="Web-{D9F816FA-F394-458A-A7CF-7E4724D7FB85}" dt="2025-11-09T19:34:02.496" v="727"/>
-          <ac:spMkLst>
-            <pc:docMk/>
-            <pc:sldMk cId="3317666236" sldId="259"/>
-            <ac:spMk id="9" creationId="{311973C2-EB8B-452A-A698-4A252FD3AE28}"/>
-          </ac:spMkLst>
-        </pc:spChg>
-        <pc:spChg chg="add del">
-          <ac:chgData name="Sládeček David" userId="S::sladecek@hradebni.cz::474d93f0-3a32-49cc-b837-47806091b590" providerId="AD" clId="Web-{D9F816FA-F394-458A-A7CF-7E4724D7FB85}" dt="2025-11-09T19:34:02.496" v="727"/>
-          <ac:spMkLst>
-            <pc:docMk/>
-            <pc:sldMk cId="3317666236" sldId="259"/>
-            <ac:spMk id="11" creationId="{10162E77-11AD-44A7-84EC-40C59EEFBD2E}"/>
-          </ac:spMkLst>
-        </pc:spChg>
         <pc:picChg chg="add mod ord">
           <ac:chgData name="Sládeček David" userId="S::sladecek@hradebni.cz::474d93f0-3a32-49cc-b837-47806091b590" providerId="AD" clId="Web-{D9F816FA-F394-458A-A7CF-7E4724D7FB85}" dt="2025-11-09T19:34:02.496" v="727"/>
           <ac:picMkLst>
@@ -590,14 +312,6 @@
             <ac:picMk id="5" creationId="{26329E1A-CE59-5BEF-71DC-7CBC2EB32AE5}"/>
           </ac:picMkLst>
         </pc:picChg>
-        <pc:cxnChg chg="add del">
-          <ac:chgData name="Sládeček David" userId="S::sladecek@hradebni.cz::474d93f0-3a32-49cc-b837-47806091b590" providerId="AD" clId="Web-{D9F816FA-F394-458A-A7CF-7E4724D7FB85}" dt="2025-11-09T19:34:02.496" v="727"/>
-          <ac:cxnSpMkLst>
-            <pc:docMk/>
-            <pc:sldMk cId="3317666236" sldId="259"/>
-            <ac:cxnSpMk id="13" creationId="{5AB158E9-1B40-4CD6-95F0-95CA11DF7B7A}"/>
-          </ac:cxnSpMkLst>
-        </pc:cxnChg>
       </pc:sldChg>
       <pc:sldChg chg="addSp delSp modSp new mod setBg">
         <pc:chgData name="Sládeček David" userId="S::sladecek@hradebni.cz::474d93f0-3a32-49cc-b837-47806091b590" providerId="AD" clId="Web-{D9F816FA-F394-458A-A7CF-7E4724D7FB85}" dt="2025-11-09T19:37:33.485" v="780" actId="20577"/>
@@ -613,14 +327,6 @@
             <ac:spMk id="2" creationId="{2A74109A-7326-7ED7-54D8-F272D8E6EE66}"/>
           </ac:spMkLst>
         </pc:spChg>
-        <pc:spChg chg="add del mod">
-          <ac:chgData name="Sládeček David" userId="S::sladecek@hradebni.cz::474d93f0-3a32-49cc-b837-47806091b590" providerId="AD" clId="Web-{D9F816FA-F394-458A-A7CF-7E4724D7FB85}" dt="2025-11-09T19:36:49.984" v="763"/>
-          <ac:spMkLst>
-            <pc:docMk/>
-            <pc:sldMk cId="3057740183" sldId="260"/>
-            <ac:spMk id="3" creationId="{75B48A58-D82D-EC8D-8288-DD2C1F205BC5}"/>
-          </ac:spMkLst>
-        </pc:spChg>
         <pc:spChg chg="add mod">
           <ac:chgData name="Sládeček David" userId="S::sladecek@hradebni.cz::474d93f0-3a32-49cc-b837-47806091b590" providerId="AD" clId="Web-{D9F816FA-F394-458A-A7CF-7E4724D7FB85}" dt="2025-11-09T19:37:33.485" v="780" actId="20577"/>
           <ac:spMkLst>
@@ -629,38 +335,6 @@
             <ac:spMk id="7" creationId="{75B48A58-D82D-EC8D-8288-DD2C1F205BC5}"/>
           </ac:spMkLst>
         </pc:spChg>
-        <pc:spChg chg="add del">
-          <ac:chgData name="Sládeček David" userId="S::sladecek@hradebni.cz::474d93f0-3a32-49cc-b837-47806091b590" providerId="AD" clId="Web-{D9F816FA-F394-458A-A7CF-7E4724D7FB85}" dt="2025-11-09T19:36:56.703" v="765"/>
-          <ac:spMkLst>
-            <pc:docMk/>
-            <pc:sldMk cId="3057740183" sldId="260"/>
-            <ac:spMk id="9" creationId="{990D0034-F768-41E7-85D4-F38C4DE85770}"/>
-          </ac:spMkLst>
-        </pc:spChg>
-        <pc:spChg chg="add del">
-          <ac:chgData name="Sládeček David" userId="S::sladecek@hradebni.cz::474d93f0-3a32-49cc-b837-47806091b590" providerId="AD" clId="Web-{D9F816FA-F394-458A-A7CF-7E4724D7FB85}" dt="2025-11-09T19:36:56.703" v="765"/>
-          <ac:spMkLst>
-            <pc:docMk/>
-            <pc:sldMk cId="3057740183" sldId="260"/>
-            <ac:spMk id="11" creationId="{C4F7E42D-8B5A-4FC8-81CD-9E60171F7FA8}"/>
-          </ac:spMkLst>
-        </pc:spChg>
-        <pc:spChg chg="add del">
-          <ac:chgData name="Sládeček David" userId="S::sladecek@hradebni.cz::474d93f0-3a32-49cc-b837-47806091b590" providerId="AD" clId="Web-{D9F816FA-F394-458A-A7CF-7E4724D7FB85}" dt="2025-11-09T19:36:56.703" v="765"/>
-          <ac:spMkLst>
-            <pc:docMk/>
-            <pc:sldMk cId="3057740183" sldId="260"/>
-            <ac:spMk id="13" creationId="{8C04651D-B9F4-4935-A02D-364153FBDF54}"/>
-          </ac:spMkLst>
-        </pc:spChg>
-        <pc:graphicFrameChg chg="add del">
-          <ac:chgData name="Sládeček David" userId="S::sladecek@hradebni.cz::474d93f0-3a32-49cc-b837-47806091b590" providerId="AD" clId="Web-{D9F816FA-F394-458A-A7CF-7E4724D7FB85}" dt="2025-11-09T19:36:49.953" v="762"/>
-          <ac:graphicFrameMkLst>
-            <pc:docMk/>
-            <pc:sldMk cId="3057740183" sldId="260"/>
-            <ac:graphicFrameMk id="5" creationId="{CCD44DF6-8487-F33F-4433-09919E88DF76}"/>
-          </ac:graphicFrameMkLst>
-        </pc:graphicFrameChg>
         <pc:picChg chg="add mod">
           <ac:chgData name="Sládeček David" userId="S::sladecek@hradebni.cz::474d93f0-3a32-49cc-b837-47806091b590" providerId="AD" clId="Web-{D9F816FA-F394-458A-A7CF-7E4724D7FB85}" dt="2025-11-09T19:36:56.703" v="765"/>
           <ac:picMkLst>
@@ -669,20 +343,6 @@
             <ac:picMk id="8" creationId="{D788D299-8B82-3493-60CE-21FEC210A489}"/>
           </ac:picMkLst>
         </pc:picChg>
-      </pc:sldChg>
-      <pc:sldChg chg="del">
-        <pc:chgData name="Sládeček David" userId="S::sladecek@hradebni.cz::474d93f0-3a32-49cc-b837-47806091b590" providerId="AD" clId="Web-{D9F816FA-F394-458A-A7CF-7E4724D7FB85}" dt="2025-11-09T19:14:39.629" v="19"/>
-        <pc:sldMkLst>
-          <pc:docMk/>
-          <pc:sldMk cId="4021854411" sldId="260"/>
-        </pc:sldMkLst>
-      </pc:sldChg>
-      <pc:sldChg chg="del">
-        <pc:chgData name="Sládeček David" userId="S::sladecek@hradebni.cz::474d93f0-3a32-49cc-b837-47806091b590" providerId="AD" clId="Web-{D9F816FA-F394-458A-A7CF-7E4724D7FB85}" dt="2025-11-09T19:14:43.177" v="23"/>
-        <pc:sldMkLst>
-          <pc:docMk/>
-          <pc:sldMk cId="1736941475" sldId="261"/>
-        </pc:sldMkLst>
       </pc:sldChg>
       <pc:sldChg chg="addSp modSp new mod setBg">
         <pc:chgData name="Sládeček David" userId="S::sladecek@hradebni.cz::474d93f0-3a32-49cc-b837-47806091b590" providerId="AD" clId="Web-{D9F816FA-F394-458A-A7CF-7E4724D7FB85}" dt="2025-11-09T19:40:07.019" v="832" actId="20577"/>
@@ -737,52 +397,6 @@
             <ac:spMk id="3" creationId="{3E7E7FA0-D37A-6E9A-C1BA-5A0817B5D3F9}"/>
           </ac:spMkLst>
         </pc:spChg>
-        <pc:spChg chg="add">
-          <ac:chgData name="Sládeček David" userId="S::sladecek@hradebni.cz::474d93f0-3a32-49cc-b837-47806091b590" providerId="AD" clId="Web-{D9F816FA-F394-458A-A7CF-7E4724D7FB85}" dt="2025-11-09T19:44:44.768" v="966"/>
-          <ac:spMkLst>
-            <pc:docMk/>
-            <pc:sldMk cId="1243925975" sldId="262"/>
-            <ac:spMk id="9" creationId="{311973C2-EB8B-452A-A698-4A252FD3AE28}"/>
-          </ac:spMkLst>
-        </pc:spChg>
-        <pc:spChg chg="add">
-          <ac:chgData name="Sládeček David" userId="S::sladecek@hradebni.cz::474d93f0-3a32-49cc-b837-47806091b590" providerId="AD" clId="Web-{D9F816FA-F394-458A-A7CF-7E4724D7FB85}" dt="2025-11-09T19:44:44.768" v="966"/>
-          <ac:spMkLst>
-            <pc:docMk/>
-            <pc:sldMk cId="1243925975" sldId="262"/>
-            <ac:spMk id="11" creationId="{10162E77-11AD-44A7-84EC-40C59EEFBD2E}"/>
-          </ac:spMkLst>
-        </pc:spChg>
-        <pc:picChg chg="add">
-          <ac:chgData name="Sládeček David" userId="S::sladecek@hradebni.cz::474d93f0-3a32-49cc-b837-47806091b590" providerId="AD" clId="Web-{D9F816FA-F394-458A-A7CF-7E4724D7FB85}" dt="2025-11-09T19:44:44.768" v="966"/>
-          <ac:picMkLst>
-            <pc:docMk/>
-            <pc:sldMk cId="1243925975" sldId="262"/>
-            <ac:picMk id="5" creationId="{529711D0-6615-68C4-13B0-186C00AB85FF}"/>
-          </ac:picMkLst>
-        </pc:picChg>
-        <pc:cxnChg chg="add">
-          <ac:chgData name="Sládeček David" userId="S::sladecek@hradebni.cz::474d93f0-3a32-49cc-b837-47806091b590" providerId="AD" clId="Web-{D9F816FA-F394-458A-A7CF-7E4724D7FB85}" dt="2025-11-09T19:44:44.768" v="966"/>
-          <ac:cxnSpMkLst>
-            <pc:docMk/>
-            <pc:sldMk cId="1243925975" sldId="262"/>
-            <ac:cxnSpMk id="13" creationId="{5AB158E9-1B40-4CD6-95F0-95CA11DF7B7A}"/>
-          </ac:cxnSpMkLst>
-        </pc:cxnChg>
-      </pc:sldChg>
-      <pc:sldChg chg="del">
-        <pc:chgData name="Sládeček David" userId="S::sladecek@hradebni.cz::474d93f0-3a32-49cc-b837-47806091b590" providerId="AD" clId="Web-{D9F816FA-F394-458A-A7CF-7E4724D7FB85}" dt="2025-11-09T19:14:43.927" v="24"/>
-        <pc:sldMkLst>
-          <pc:docMk/>
-          <pc:sldMk cId="3301259840" sldId="262"/>
-        </pc:sldMkLst>
-      </pc:sldChg>
-      <pc:sldChg chg="del">
-        <pc:chgData name="Sládeček David" userId="S::sladecek@hradebni.cz::474d93f0-3a32-49cc-b837-47806091b590" providerId="AD" clId="Web-{D9F816FA-F394-458A-A7CF-7E4724D7FB85}" dt="2025-11-09T19:14:44.755" v="25"/>
-        <pc:sldMkLst>
-          <pc:docMk/>
-          <pc:sldMk cId="3354684545" sldId="263"/>
-        </pc:sldMkLst>
       </pc:sldChg>
       <pc:sldChg chg="modSp new">
         <pc:chgData name="Sládeček David" userId="S::sladecek@hradebni.cz::474d93f0-3a32-49cc-b837-47806091b590" providerId="AD" clId="Web-{D9F816FA-F394-458A-A7CF-7E4724D7FB85}" dt="2025-11-09T19:44:39.674" v="965" actId="20577"/>
@@ -806,41 +420,6 @@
             <ac:spMk id="3" creationId="{CD855492-873A-E1FC-B57B-F03B9AF69CE2}"/>
           </ac:spMkLst>
         </pc:spChg>
-      </pc:sldChg>
-      <pc:sldChg chg="del">
-        <pc:chgData name="Sládeček David" userId="S::sladecek@hradebni.cz::474d93f0-3a32-49cc-b837-47806091b590" providerId="AD" clId="Web-{D9F816FA-F394-458A-A7CF-7E4724D7FB85}" dt="2025-11-09T19:14:38.410" v="18"/>
-        <pc:sldMkLst>
-          <pc:docMk/>
-          <pc:sldMk cId="1719289132" sldId="264"/>
-        </pc:sldMkLst>
-      </pc:sldChg>
-      <pc:sldChg chg="del">
-        <pc:chgData name="Sládeček David" userId="S::sladecek@hradebni.cz::474d93f0-3a32-49cc-b837-47806091b590" providerId="AD" clId="Web-{D9F816FA-F394-458A-A7CF-7E4724D7FB85}" dt="2025-11-09T19:14:38.410" v="17"/>
-        <pc:sldMkLst>
-          <pc:docMk/>
-          <pc:sldMk cId="1071550909" sldId="265"/>
-        </pc:sldMkLst>
-      </pc:sldChg>
-      <pc:sldChg chg="del">
-        <pc:chgData name="Sládeček David" userId="S::sladecek@hradebni.cz::474d93f0-3a32-49cc-b837-47806091b590" providerId="AD" clId="Web-{D9F816FA-F394-458A-A7CF-7E4724D7FB85}" dt="2025-11-09T19:14:38.410" v="16"/>
-        <pc:sldMkLst>
-          <pc:docMk/>
-          <pc:sldMk cId="4190888127" sldId="266"/>
-        </pc:sldMkLst>
-      </pc:sldChg>
-      <pc:sldChg chg="del">
-        <pc:chgData name="Sládeček David" userId="S::sladecek@hradebni.cz::474d93f0-3a32-49cc-b837-47806091b590" providerId="AD" clId="Web-{D9F816FA-F394-458A-A7CF-7E4724D7FB85}" dt="2025-11-09T19:14:38.410" v="15"/>
-        <pc:sldMkLst>
-          <pc:docMk/>
-          <pc:sldMk cId="1860899900" sldId="267"/>
-        </pc:sldMkLst>
-      </pc:sldChg>
-      <pc:sldChg chg="del">
-        <pc:chgData name="Sládeček David" userId="S::sladecek@hradebni.cz::474d93f0-3a32-49cc-b837-47806091b590" providerId="AD" clId="Web-{D9F816FA-F394-458A-A7CF-7E4724D7FB85}" dt="2025-11-09T19:14:35.457" v="14"/>
-        <pc:sldMkLst>
-          <pc:docMk/>
-          <pc:sldMk cId="714891676" sldId="268"/>
-        </pc:sldMkLst>
       </pc:sldChg>
     </pc:docChg>
   </pc:docChgLst>
@@ -896,30 +475,6 @@
             <ac:spMk id="3" creationId="{026EF9B7-A28A-7BE2-55F7-2318405507D3}"/>
           </ac:spMkLst>
         </pc:spChg>
-        <pc:spChg chg="del">
-          <ac:chgData name="Sládeček David" userId="S::sladecek@hradebni.cz::474d93f0-3a32-49cc-b837-47806091b590" providerId="AD" clId="Web-{9320EE62-74E3-4CCA-95E0-27E2C449C5BE}" dt="2025-11-09T19:45:23.735" v="1"/>
-          <ac:spMkLst>
-            <pc:docMk/>
-            <pc:sldMk cId="2123910099" sldId="257"/>
-            <ac:spMk id="28" creationId="{5CF81D86-BDBA-477C-B7DD-8D359BB9965B}"/>
-          </ac:spMkLst>
-        </pc:spChg>
-        <pc:spChg chg="del">
-          <ac:chgData name="Sládeček David" userId="S::sladecek@hradebni.cz::474d93f0-3a32-49cc-b837-47806091b590" providerId="AD" clId="Web-{9320EE62-74E3-4CCA-95E0-27E2C449C5BE}" dt="2025-11-09T19:45:23.735" v="1"/>
-          <ac:spMkLst>
-            <pc:docMk/>
-            <pc:sldMk cId="2123910099" sldId="257"/>
-            <ac:spMk id="32" creationId="{88AA064E-5F6E-4024-BC28-EDDC3DFC70E1}"/>
-          </ac:spMkLst>
-        </pc:spChg>
-        <pc:spChg chg="del">
-          <ac:chgData name="Sládeček David" userId="S::sladecek@hradebni.cz::474d93f0-3a32-49cc-b837-47806091b590" providerId="AD" clId="Web-{9320EE62-74E3-4CCA-95E0-27E2C449C5BE}" dt="2025-11-09T19:45:23.735" v="1"/>
-          <ac:spMkLst>
-            <pc:docMk/>
-            <pc:sldMk cId="2123910099" sldId="257"/>
-            <ac:spMk id="34" creationId="{03B29638-4838-4B9B-B9DB-96E542BAF3E6}"/>
-          </ac:spMkLst>
-        </pc:spChg>
         <pc:picChg chg="mod">
           <ac:chgData name="Sládeček David" userId="S::sladecek@hradebni.cz::474d93f0-3a32-49cc-b837-47806091b590" providerId="AD" clId="Web-{9320EE62-74E3-4CCA-95E0-27E2C449C5BE}" dt="2025-11-09T19:47:48.334" v="17"/>
           <ac:picMkLst>
@@ -928,14 +483,6 @@
             <ac:picMk id="22" creationId="{264A36DE-62D4-EBB1-6B23-78F9AC2E9669}"/>
           </ac:picMkLst>
         </pc:picChg>
-        <pc:cxnChg chg="del">
-          <ac:chgData name="Sládeček David" userId="S::sladecek@hradebni.cz::474d93f0-3a32-49cc-b837-47806091b590" providerId="AD" clId="Web-{9320EE62-74E3-4CCA-95E0-27E2C449C5BE}" dt="2025-11-09T19:45:23.735" v="1"/>
-          <ac:cxnSpMkLst>
-            <pc:docMk/>
-            <pc:sldMk cId="2123910099" sldId="257"/>
-            <ac:cxnSpMk id="30" creationId="{C65F3E9C-EF11-4F8F-A621-399C7A3E6401}"/>
-          </ac:cxnSpMkLst>
-        </pc:cxnChg>
       </pc:sldChg>
       <pc:sldChg chg="modSp mod modClrScheme chgLayout">
         <pc:chgData name="Sládeček David" userId="S::sladecek@hradebni.cz::474d93f0-3a32-49cc-b837-47806091b590" providerId="AD" clId="Web-{9320EE62-74E3-4CCA-95E0-27E2C449C5BE}" dt="2025-11-09T19:45:23.735" v="1"/>
@@ -1051,38 +598,6 @@
             <ac:spMk id="3" creationId="{3E7E7FA0-D37A-6E9A-C1BA-5A0817B5D3F9}"/>
           </ac:spMkLst>
         </pc:spChg>
-        <pc:spChg chg="add del">
-          <ac:chgData name="Sládeček David" userId="S::sladecek@hradebni.cz::474d93f0-3a32-49cc-b837-47806091b590" providerId="AD" clId="Web-{9320EE62-74E3-4CCA-95E0-27E2C449C5BE}" dt="2025-11-09T19:46:20.722" v="5"/>
-          <ac:spMkLst>
-            <pc:docMk/>
-            <pc:sldMk cId="1243925975" sldId="262"/>
-            <ac:spMk id="6" creationId="{311973C2-EB8B-452A-A698-4A252FD3AE28}"/>
-          </ac:spMkLst>
-        </pc:spChg>
-        <pc:spChg chg="add del">
-          <ac:chgData name="Sládeček David" userId="S::sladecek@hradebni.cz::474d93f0-3a32-49cc-b837-47806091b590" providerId="AD" clId="Web-{9320EE62-74E3-4CCA-95E0-27E2C449C5BE}" dt="2025-11-09T19:46:20.722" v="5"/>
-          <ac:spMkLst>
-            <pc:docMk/>
-            <pc:sldMk cId="1243925975" sldId="262"/>
-            <ac:spMk id="7" creationId="{10162E77-11AD-44A7-84EC-40C59EEFBD2E}"/>
-          </ac:spMkLst>
-        </pc:spChg>
-        <pc:spChg chg="del">
-          <ac:chgData name="Sládeček David" userId="S::sladecek@hradebni.cz::474d93f0-3a32-49cc-b837-47806091b590" providerId="AD" clId="Web-{9320EE62-74E3-4CCA-95E0-27E2C449C5BE}" dt="2025-11-09T19:45:23.735" v="1"/>
-          <ac:spMkLst>
-            <pc:docMk/>
-            <pc:sldMk cId="1243925975" sldId="262"/>
-            <ac:spMk id="9" creationId="{311973C2-EB8B-452A-A698-4A252FD3AE28}"/>
-          </ac:spMkLst>
-        </pc:spChg>
-        <pc:spChg chg="del">
-          <ac:chgData name="Sládeček David" userId="S::sladecek@hradebni.cz::474d93f0-3a32-49cc-b837-47806091b590" providerId="AD" clId="Web-{9320EE62-74E3-4CCA-95E0-27E2C449C5BE}" dt="2025-11-09T19:45:23.735" v="1"/>
-          <ac:spMkLst>
-            <pc:docMk/>
-            <pc:sldMk cId="1243925975" sldId="262"/>
-            <ac:spMk id="11" creationId="{10162E77-11AD-44A7-84EC-40C59EEFBD2E}"/>
-          </ac:spMkLst>
-        </pc:spChg>
         <pc:spChg chg="add">
           <ac:chgData name="Sládeček David" userId="S::sladecek@hradebni.cz::474d93f0-3a32-49cc-b837-47806091b590" providerId="AD" clId="Web-{9320EE62-74E3-4CCA-95E0-27E2C449C5BE}" dt="2025-11-09T19:46:20.722" v="5"/>
           <ac:spMkLst>
@@ -1115,38 +630,6 @@
             <ac:picMk id="4" creationId="{6067604E-ED87-EB58-B057-2B3EE386A25C}"/>
           </ac:picMkLst>
         </pc:picChg>
-        <pc:picChg chg="del">
-          <ac:chgData name="Sládeček David" userId="S::sladecek@hradebni.cz::474d93f0-3a32-49cc-b837-47806091b590" providerId="AD" clId="Web-{9320EE62-74E3-4CCA-95E0-27E2C449C5BE}" dt="2025-11-09T19:45:10.579" v="0"/>
-          <ac:picMkLst>
-            <pc:docMk/>
-            <pc:sldMk cId="1243925975" sldId="262"/>
-            <ac:picMk id="5" creationId="{529711D0-6615-68C4-13B0-186C00AB85FF}"/>
-          </ac:picMkLst>
-        </pc:picChg>
-        <pc:picChg chg="add del">
-          <ac:chgData name="Sládeček David" userId="S::sladecek@hradebni.cz::474d93f0-3a32-49cc-b837-47806091b590" providerId="AD" clId="Web-{9320EE62-74E3-4CCA-95E0-27E2C449C5BE}" dt="2025-11-09T19:46:10.674" v="3"/>
-          <ac:picMkLst>
-            <pc:docMk/>
-            <pc:sldMk cId="1243925975" sldId="262"/>
-            <ac:picMk id="8" creationId="{23DF48D1-042D-2323-37CE-944EB35A423C}"/>
-          </ac:picMkLst>
-        </pc:picChg>
-        <pc:cxnChg chg="add del">
-          <ac:chgData name="Sládeček David" userId="S::sladecek@hradebni.cz::474d93f0-3a32-49cc-b837-47806091b590" providerId="AD" clId="Web-{9320EE62-74E3-4CCA-95E0-27E2C449C5BE}" dt="2025-11-09T19:46:20.722" v="5"/>
-          <ac:cxnSpMkLst>
-            <pc:docMk/>
-            <pc:sldMk cId="1243925975" sldId="262"/>
-            <ac:cxnSpMk id="10" creationId="{5AB158E9-1B40-4CD6-95F0-95CA11DF7B7A}"/>
-          </ac:cxnSpMkLst>
-        </pc:cxnChg>
-        <pc:cxnChg chg="del">
-          <ac:chgData name="Sládeček David" userId="S::sladecek@hradebni.cz::474d93f0-3a32-49cc-b837-47806091b590" providerId="AD" clId="Web-{9320EE62-74E3-4CCA-95E0-27E2C449C5BE}" dt="2025-11-09T19:45:23.735" v="1"/>
-          <ac:cxnSpMkLst>
-            <pc:docMk/>
-            <pc:sldMk cId="1243925975" sldId="262"/>
-            <ac:cxnSpMk id="13" creationId="{5AB158E9-1B40-4CD6-95F0-95CA11DF7B7A}"/>
-          </ac:cxnSpMkLst>
-        </pc:cxnChg>
         <pc:cxnChg chg="add">
           <ac:chgData name="Sládeček David" userId="S::sladecek@hradebni.cz::474d93f0-3a32-49cc-b837-47806091b590" providerId="AD" clId="Web-{9320EE62-74E3-4CCA-95E0-27E2C449C5BE}" dt="2025-11-09T19:46:20.722" v="5"/>
           <ac:cxnSpMkLst>
@@ -1178,22 +661,6 @@
             <ac:spMk id="3" creationId="{CD855492-873A-E1FC-B57B-F03B9AF69CE2}"/>
           </ac:spMkLst>
         </pc:spChg>
-        <pc:spChg chg="add del">
-          <ac:chgData name="Sládeček David" userId="S::sladecek@hradebni.cz::474d93f0-3a32-49cc-b837-47806091b590" providerId="AD" clId="Web-{9320EE62-74E3-4CCA-95E0-27E2C449C5BE}" dt="2025-11-09T19:46:48.379" v="8"/>
-          <ac:spMkLst>
-            <pc:docMk/>
-            <pc:sldMk cId="3903226095" sldId="263"/>
-            <ac:spMk id="9" creationId="{311973C2-EB8B-452A-A698-4A252FD3AE28}"/>
-          </ac:spMkLst>
-        </pc:spChg>
-        <pc:spChg chg="add del">
-          <ac:chgData name="Sládeček David" userId="S::sladecek@hradebni.cz::474d93f0-3a32-49cc-b837-47806091b590" providerId="AD" clId="Web-{9320EE62-74E3-4CCA-95E0-27E2C449C5BE}" dt="2025-11-09T19:46:48.379" v="8"/>
-          <ac:spMkLst>
-            <pc:docMk/>
-            <pc:sldMk cId="3903226095" sldId="263"/>
-            <ac:spMk id="11" creationId="{10162E77-11AD-44A7-84EC-40C59EEFBD2E}"/>
-          </ac:spMkLst>
-        </pc:spChg>
         <pc:picChg chg="add mod ord">
           <ac:chgData name="Sládeček David" userId="S::sladecek@hradebni.cz::474d93f0-3a32-49cc-b837-47806091b590" providerId="AD" clId="Web-{9320EE62-74E3-4CCA-95E0-27E2C449C5BE}" dt="2025-11-09T19:46:48.379" v="8"/>
           <ac:picMkLst>
@@ -1202,110 +669,7 @@
             <ac:picMk id="5" creationId="{AF525E49-C4AF-0CD4-6324-2A781172BFD3}"/>
           </ac:picMkLst>
         </pc:picChg>
-        <pc:cxnChg chg="add del">
-          <ac:chgData name="Sládeček David" userId="S::sladecek@hradebni.cz::474d93f0-3a32-49cc-b837-47806091b590" providerId="AD" clId="Web-{9320EE62-74E3-4CCA-95E0-27E2C449C5BE}" dt="2025-11-09T19:46:48.379" v="8"/>
-          <ac:cxnSpMkLst>
-            <pc:docMk/>
-            <pc:sldMk cId="3903226095" sldId="263"/>
-            <ac:cxnSpMk id="13" creationId="{5AB158E9-1B40-4CD6-95F0-95CA11DF7B7A}"/>
-          </ac:cxnSpMkLst>
-        </pc:cxnChg>
       </pc:sldChg>
-      <pc:sldMasterChg chg="del delSldLayout">
-        <pc:chgData name="Sládeček David" userId="S::sladecek@hradebni.cz::474d93f0-3a32-49cc-b837-47806091b590" providerId="AD" clId="Web-{9320EE62-74E3-4CCA-95E0-27E2C449C5BE}" dt="2025-11-09T19:45:23.735" v="1"/>
-        <pc:sldMasterMkLst>
-          <pc:docMk/>
-          <pc:sldMasterMk cId="180395375" sldId="2147483660"/>
-        </pc:sldMasterMkLst>
-        <pc:sldLayoutChg chg="del">
-          <pc:chgData name="Sládeček David" userId="S::sladecek@hradebni.cz::474d93f0-3a32-49cc-b837-47806091b590" providerId="AD" clId="Web-{9320EE62-74E3-4CCA-95E0-27E2C449C5BE}" dt="2025-11-09T19:45:23.735" v="1"/>
-          <pc:sldLayoutMkLst>
-            <pc:docMk/>
-            <pc:sldMasterMk cId="180395375" sldId="2147483660"/>
-            <pc:sldLayoutMk cId="1367640231" sldId="2147483661"/>
-          </pc:sldLayoutMkLst>
-        </pc:sldLayoutChg>
-        <pc:sldLayoutChg chg="del">
-          <pc:chgData name="Sládeček David" userId="S::sladecek@hradebni.cz::474d93f0-3a32-49cc-b837-47806091b590" providerId="AD" clId="Web-{9320EE62-74E3-4CCA-95E0-27E2C449C5BE}" dt="2025-11-09T19:45:23.735" v="1"/>
-          <pc:sldLayoutMkLst>
-            <pc:docMk/>
-            <pc:sldMasterMk cId="180395375" sldId="2147483660"/>
-            <pc:sldLayoutMk cId="2049454506" sldId="2147483662"/>
-          </pc:sldLayoutMkLst>
-        </pc:sldLayoutChg>
-        <pc:sldLayoutChg chg="del">
-          <pc:chgData name="Sládeček David" userId="S::sladecek@hradebni.cz::474d93f0-3a32-49cc-b837-47806091b590" providerId="AD" clId="Web-{9320EE62-74E3-4CCA-95E0-27E2C449C5BE}" dt="2025-11-09T19:45:23.735" v="1"/>
-          <pc:sldLayoutMkLst>
-            <pc:docMk/>
-            <pc:sldMasterMk cId="180395375" sldId="2147483660"/>
-            <pc:sldLayoutMk cId="2971359735" sldId="2147483663"/>
-          </pc:sldLayoutMkLst>
-        </pc:sldLayoutChg>
-        <pc:sldLayoutChg chg="del">
-          <pc:chgData name="Sládeček David" userId="S::sladecek@hradebni.cz::474d93f0-3a32-49cc-b837-47806091b590" providerId="AD" clId="Web-{9320EE62-74E3-4CCA-95E0-27E2C449C5BE}" dt="2025-11-09T19:45:23.735" v="1"/>
-          <pc:sldLayoutMkLst>
-            <pc:docMk/>
-            <pc:sldMasterMk cId="180395375" sldId="2147483660"/>
-            <pc:sldLayoutMk cId="822649484" sldId="2147483664"/>
-          </pc:sldLayoutMkLst>
-        </pc:sldLayoutChg>
-        <pc:sldLayoutChg chg="del">
-          <pc:chgData name="Sládeček David" userId="S::sladecek@hradebni.cz::474d93f0-3a32-49cc-b837-47806091b590" providerId="AD" clId="Web-{9320EE62-74E3-4CCA-95E0-27E2C449C5BE}" dt="2025-11-09T19:45:23.735" v="1"/>
-          <pc:sldLayoutMkLst>
-            <pc:docMk/>
-            <pc:sldMasterMk cId="180395375" sldId="2147483660"/>
-            <pc:sldLayoutMk cId="2433754810" sldId="2147483665"/>
-          </pc:sldLayoutMkLst>
-        </pc:sldLayoutChg>
-        <pc:sldLayoutChg chg="del">
-          <pc:chgData name="Sládeček David" userId="S::sladecek@hradebni.cz::474d93f0-3a32-49cc-b837-47806091b590" providerId="AD" clId="Web-{9320EE62-74E3-4CCA-95E0-27E2C449C5BE}" dt="2025-11-09T19:45:23.735" v="1"/>
-          <pc:sldLayoutMkLst>
-            <pc:docMk/>
-            <pc:sldMasterMk cId="180395375" sldId="2147483660"/>
-            <pc:sldLayoutMk cId="2603473105" sldId="2147483666"/>
-          </pc:sldLayoutMkLst>
-        </pc:sldLayoutChg>
-        <pc:sldLayoutChg chg="del">
-          <pc:chgData name="Sládeček David" userId="S::sladecek@hradebni.cz::474d93f0-3a32-49cc-b837-47806091b590" providerId="AD" clId="Web-{9320EE62-74E3-4CCA-95E0-27E2C449C5BE}" dt="2025-11-09T19:45:23.735" v="1"/>
-          <pc:sldLayoutMkLst>
-            <pc:docMk/>
-            <pc:sldMasterMk cId="180395375" sldId="2147483660"/>
-            <pc:sldLayoutMk cId="3263398462" sldId="2147483667"/>
-          </pc:sldLayoutMkLst>
-        </pc:sldLayoutChg>
-        <pc:sldLayoutChg chg="del">
-          <pc:chgData name="Sládeček David" userId="S::sladecek@hradebni.cz::474d93f0-3a32-49cc-b837-47806091b590" providerId="AD" clId="Web-{9320EE62-74E3-4CCA-95E0-27E2C449C5BE}" dt="2025-11-09T19:45:23.735" v="1"/>
-          <pc:sldLayoutMkLst>
-            <pc:docMk/>
-            <pc:sldMasterMk cId="180395375" sldId="2147483660"/>
-            <pc:sldLayoutMk cId="1899346236" sldId="2147483668"/>
-          </pc:sldLayoutMkLst>
-        </pc:sldLayoutChg>
-        <pc:sldLayoutChg chg="del">
-          <pc:chgData name="Sládeček David" userId="S::sladecek@hradebni.cz::474d93f0-3a32-49cc-b837-47806091b590" providerId="AD" clId="Web-{9320EE62-74E3-4CCA-95E0-27E2C449C5BE}" dt="2025-11-09T19:45:23.735" v="1"/>
-          <pc:sldLayoutMkLst>
-            <pc:docMk/>
-            <pc:sldMasterMk cId="180395375" sldId="2147483660"/>
-            <pc:sldLayoutMk cId="3743438848" sldId="2147483669"/>
-          </pc:sldLayoutMkLst>
-        </pc:sldLayoutChg>
-        <pc:sldLayoutChg chg="del">
-          <pc:chgData name="Sládeček David" userId="S::sladecek@hradebni.cz::474d93f0-3a32-49cc-b837-47806091b590" providerId="AD" clId="Web-{9320EE62-74E3-4CCA-95E0-27E2C449C5BE}" dt="2025-11-09T19:45:23.735" v="1"/>
-          <pc:sldLayoutMkLst>
-            <pc:docMk/>
-            <pc:sldMasterMk cId="180395375" sldId="2147483660"/>
-            <pc:sldLayoutMk cId="3754628914" sldId="2147483670"/>
-          </pc:sldLayoutMkLst>
-        </pc:sldLayoutChg>
-        <pc:sldLayoutChg chg="del">
-          <pc:chgData name="Sládeček David" userId="S::sladecek@hradebni.cz::474d93f0-3a32-49cc-b837-47806091b590" providerId="AD" clId="Web-{9320EE62-74E3-4CCA-95E0-27E2C449C5BE}" dt="2025-11-09T19:45:23.735" v="1"/>
-          <pc:sldLayoutMkLst>
-            <pc:docMk/>
-            <pc:sldMasterMk cId="180395375" sldId="2147483660"/>
-            <pc:sldLayoutMk cId="3167322955" sldId="2147483671"/>
-          </pc:sldLayoutMkLst>
-        </pc:sldLayoutChg>
-      </pc:sldMasterChg>
       <pc:sldMasterChg chg="add addSldLayout modSldLayout">
         <pc:chgData name="Sládeček David" userId="S::sladecek@hradebni.cz::474d93f0-3a32-49cc-b837-47806091b590" providerId="AD" clId="Web-{9320EE62-74E3-4CCA-95E0-27E2C449C5BE}" dt="2025-11-09T19:45:23.735" v="1"/>
         <pc:sldMasterMkLst>
@@ -1488,7 +852,7 @@
           <a:p>
             <a:fld id="{DD1C0AFD-19C8-4F60-A212-D1160A075A71}" type="datetimeFigureOut">
               <a:rPr lang="cs-CZ" smtClean="0"/>
-              <a:t>09.11.2025</a:t>
+              <a:t>18.11.2025</a:t>
             </a:fld>
             <a:endParaRPr lang="cs-CZ"/>
           </a:p>
@@ -2126,7 +1490,7 @@
           <a:p>
             <a:fld id="{4BDF68E2-58F2-4D09-BE8B-E3BD06533059}" type="datetimeFigureOut">
               <a:rPr lang="en-US" dirty="0"/>
-              <a:t>11/9/2025</a:t>
+              <a:t>11/18/2025</a:t>
             </a:fld>
             <a:endParaRPr lang="en-US" dirty="0"/>
           </a:p>
@@ -2332,7 +1696,7 @@
           <a:p>
             <a:fld id="{2E2D6473-DF6D-4702-B328-E0DD40540A4E}" type="datetimeFigureOut">
               <a:rPr lang="en-US" dirty="0"/>
-              <a:t>11/9/2025</a:t>
+              <a:t>11/18/2025</a:t>
             </a:fld>
             <a:endParaRPr lang="en-US" dirty="0"/>
           </a:p>
@@ -2586,7 +1950,7 @@
           <a:p>
             <a:fld id="{E26F7E3A-B166-407D-9866-32884E7D5B37}" type="datetimeFigureOut">
               <a:rPr lang="en-US" dirty="0"/>
-              <a:t>11/9/2025</a:t>
+              <a:t>11/18/2025</a:t>
             </a:fld>
             <a:endParaRPr lang="en-US" dirty="0"/>
           </a:p>
@@ -2758,7 +2122,7 @@
           <a:p>
             <a:fld id="{528FC5F6-F338-4AE4-BB23-26385BCFC423}" type="datetimeFigureOut">
               <a:rPr lang="en-US" dirty="0"/>
-              <a:t>11/9/2025</a:t>
+              <a:t>11/18/2025</a:t>
             </a:fld>
             <a:endParaRPr lang="en-US" dirty="0"/>
           </a:p>
@@ -3100,7 +2464,7 @@
           <a:p>
             <a:fld id="{20EBB0C4-6273-4C6E-B9BD-2EDC30F1CD52}" type="datetimeFigureOut">
               <a:rPr lang="en-US" dirty="0"/>
-              <a:t>11/9/2025</a:t>
+              <a:t>11/18/2025</a:t>
             </a:fld>
             <a:endParaRPr lang="en-US" dirty="0"/>
           </a:p>
@@ -3372,7 +2736,7 @@
           <a:p>
             <a:fld id="{19AB4D41-86C1-4908-B66A-0B50CEB3BF29}" type="datetimeFigureOut">
               <a:rPr lang="en-US" dirty="0"/>
-              <a:t>11/9/2025</a:t>
+              <a:t>11/18/2025</a:t>
             </a:fld>
             <a:endParaRPr lang="en-US" dirty="0"/>
           </a:p>
@@ -3748,7 +3112,7 @@
           <a:p>
             <a:fld id="{E6426E2C-56C1-4E0D-A793-0088A7FDD37E}" type="datetimeFigureOut">
               <a:rPr lang="en-US" dirty="0"/>
-              <a:t>11/9/2025</a:t>
+              <a:t>11/18/2025</a:t>
             </a:fld>
             <a:endParaRPr lang="en-US" dirty="0"/>
           </a:p>
@@ -3865,7 +3229,7 @@
           <a:p>
             <a:fld id="{C8C39B41-D8B5-4052-B551-9B5525EAA8B6}" type="datetimeFigureOut">
               <a:rPr lang="en-US" dirty="0"/>
-              <a:t>11/9/2025</a:t>
+              <a:t>11/18/2025</a:t>
             </a:fld>
             <a:endParaRPr lang="en-US" dirty="0"/>
           </a:p>
@@ -4036,7 +3400,7 @@
           <a:p>
             <a:fld id="{4D94136C-8742-45B2-AF27-D93DF72833A9}" type="datetimeFigureOut">
               <a:rPr lang="en-US" dirty="0"/>
-              <a:t>11/9/2025</a:t>
+              <a:t>11/18/2025</a:t>
             </a:fld>
             <a:endParaRPr lang="en-US" dirty="0"/>
           </a:p>
@@ -4389,7 +3753,7 @@
           <a:p>
             <a:fld id="{32ABBEA6-7C60-4B02-AE87-00D78D8422AF}" type="datetimeFigureOut">
               <a:rPr lang="en-US" dirty="0"/>
-              <a:t>11/9/2025</a:t>
+              <a:t>11/18/2025</a:t>
             </a:fld>
             <a:endParaRPr lang="en-US" dirty="0"/>
           </a:p>
@@ -4767,7 +4131,7 @@
           <a:p>
             <a:fld id="{C9CAD897-D46E-4AD2-BD9B-49DD3E640873}" type="datetimeFigureOut">
               <a:rPr lang="en-US" dirty="0"/>
-              <a:t>11/9/2025</a:t>
+              <a:t>11/18/2025</a:t>
             </a:fld>
             <a:endParaRPr lang="en-US" dirty="0"/>
           </a:p>
@@ -5052,7 +4416,7 @@
           <a:p>
             <a:fld id="{98624D31-43A5-475A-80CF-332C9F6DCF35}" type="datetimeFigureOut">
               <a:rPr lang="en-US" dirty="0"/>
-              <a:t>11/9/2025</a:t>
+              <a:t>11/18/2025</a:t>
             </a:fld>
             <a:endParaRPr lang="en-US" dirty="0"/>
           </a:p>
@@ -6321,21 +5685,7 @@
                 <a:ea typeface="Calibri"/>
                 <a:cs typeface="Calibri"/>
               </a:rPr>
-              <a:t>MAC adresa </a:t>
-            </a:r>
-            <a:r>
-              <a:rPr lang="cs-CZ" sz="1800" dirty="0" err="1">
-                <a:ea typeface="Calibri"/>
-                <a:cs typeface="Calibri"/>
-              </a:rPr>
-              <a:t>zaříení</a:t>
-            </a:r>
-            <a:r>
-              <a:rPr lang="cs-CZ" sz="1800" dirty="0">
-                <a:ea typeface="Calibri"/>
-                <a:cs typeface="Calibri"/>
-              </a:rPr>
-              <a:t> - fyzická adresa pro rozlišení v LAN</a:t>
+              <a:t>MAC adresa zařízení - fyzická adresa pro rozlišení v LAN</a:t>
             </a:r>
           </a:p>
           <a:p>
@@ -7618,18 +6968,18 @@
               <a:t>Jak poznat </a:t>
             </a:r>
             <a:r>
-              <a:rPr lang="cs-CZ" sz="2400" i="1" err="1">
+              <a:rPr lang="cs-CZ" sz="2400" i="1" dirty="0" err="1">
                 <a:ea typeface="Calibri"/>
                 <a:cs typeface="Calibri"/>
               </a:rPr>
               <a:t>phisingový</a:t>
             </a:r>
             <a:r>
-              <a:rPr lang="cs-CZ" sz="2400" i="1" dirty="0">
+              <a:rPr lang="cs-CZ" sz="2400" i="1">
                 <a:ea typeface="Calibri"/>
                 <a:cs typeface="Calibri"/>
               </a:rPr>
-              <a:t> útok?</a:t>
+              <a:t> útok? Co je to DDOS?</a:t>
             </a:r>
           </a:p>
         </p:txBody>
@@ -8287,14 +7637,20 @@
 
 <file path=customXml/item2.xml><?xml version="1.0" encoding="utf-8"?>
 <p:properties xmlns:p="http://schemas.microsoft.com/office/2006/metadata/properties" xmlns:xsi="http://www.w3.org/2001/XMLSchema-instance" xmlns:pc="http://schemas.microsoft.com/office/infopath/2007/PartnerControls">
-  <documentManagement/>
+  <documentManagement>
+    <TaxCatchAll xmlns="3eb61919-e7f8-4a11-8db4-9145fbd21da9" xsi:nil="true"/>
+    <lcf76f155ced4ddcb4097134ff3c332f xmlns="09a37b55-a4d7-45bd-a73f-33c2b1d41898">
+      <Terms xmlns="http://schemas.microsoft.com/office/infopath/2007/PartnerControls"/>
+    </lcf76f155ced4ddcb4097134ff3c332f>
+  </documentManagement>
 </p:properties>
 </file>
 
 <file path=customXml/item3.xml><?xml version="1.0" encoding="utf-8"?>
-<ct:contentTypeSchema xmlns:ct="http://schemas.microsoft.com/office/2006/metadata/contentType" xmlns:ma="http://schemas.microsoft.com/office/2006/metadata/properties/metaAttributes" ct:_="" ma:_="" ma:contentTypeName="Dokument" ma:contentTypeID="0x01010052F7ECDF1E614946A5A39D5552BFC522" ma:contentTypeVersion="3" ma:contentTypeDescription="Vytvoří nový dokument" ma:contentTypeScope="" ma:versionID="46857a25b9010b327498af3a5b6eabd4">
-  <xsd:schema xmlns:xsd="http://www.w3.org/2001/XMLSchema" xmlns:xs="http://www.w3.org/2001/XMLSchema" xmlns:p="http://schemas.microsoft.com/office/2006/metadata/properties" xmlns:ns2="09a37b55-a4d7-45bd-a73f-33c2b1d41898" targetNamespace="http://schemas.microsoft.com/office/2006/metadata/properties" ma:root="true" ma:fieldsID="999ee9523eec8e49bb4a95950769a7f5" ns2:_="">
+<ct:contentTypeSchema xmlns:ct="http://schemas.microsoft.com/office/2006/metadata/contentType" xmlns:ma="http://schemas.microsoft.com/office/2006/metadata/properties/metaAttributes" ct:_="" ma:_="" ma:contentTypeName="Dokument" ma:contentTypeID="0x01010052F7ECDF1E614946A5A39D5552BFC522" ma:contentTypeVersion="9" ma:contentTypeDescription="Vytvoří nový dokument" ma:contentTypeScope="" ma:versionID="cec7e99e499b1a399f5002d8f5cf0989">
+  <xsd:schema xmlns:xsd="http://www.w3.org/2001/XMLSchema" xmlns:xs="http://www.w3.org/2001/XMLSchema" xmlns:p="http://schemas.microsoft.com/office/2006/metadata/properties" xmlns:ns2="09a37b55-a4d7-45bd-a73f-33c2b1d41898" xmlns:ns3="3eb61919-e7f8-4a11-8db4-9145fbd21da9" targetNamespace="http://schemas.microsoft.com/office/2006/metadata/properties" ma:root="true" ma:fieldsID="7040e20160986dd2b45602a8e4e840ef" ns2:_="" ns3:_="">
     <xsd:import namespace="09a37b55-a4d7-45bd-a73f-33c2b1d41898"/>
+    <xsd:import namespace="3eb61919-e7f8-4a11-8db4-9145fbd21da9"/>
     <xsd:element name="properties">
       <xsd:complexType>
         <xsd:sequence>
@@ -8304,6 +7660,11 @@
                 <xsd:element ref="ns2:MediaServiceMetadata" minOccurs="0"/>
                 <xsd:element ref="ns2:MediaServiceFastMetadata" minOccurs="0"/>
                 <xsd:element ref="ns2:MediaServiceSearchProperties" minOccurs="0"/>
+                <xsd:element ref="ns2:MediaServiceDateTaken" minOccurs="0"/>
+                <xsd:element ref="ns2:lcf76f155ced4ddcb4097134ff3c332f" minOccurs="0"/>
+                <xsd:element ref="ns3:TaxCatchAll" minOccurs="0"/>
+                <xsd:element ref="ns2:MediaServiceGenerationTime" minOccurs="0"/>
+                <xsd:element ref="ns2:MediaServiceEventHashCode" minOccurs="0"/>
               </xsd:all>
             </xsd:complexType>
           </xsd:element>
@@ -8328,6 +7689,43 @@
       <xsd:simpleType>
         <xsd:restriction base="dms:Note"/>
       </xsd:simpleType>
+    </xsd:element>
+    <xsd:element name="MediaServiceDateTaken" ma:index="11" nillable="true" ma:displayName="MediaServiceDateTaken" ma:hidden="true" ma:indexed="true" ma:internalName="MediaServiceDateTaken" ma:readOnly="true">
+      <xsd:simpleType>
+        <xsd:restriction base="dms:Text"/>
+      </xsd:simpleType>
+    </xsd:element>
+    <xsd:element name="lcf76f155ced4ddcb4097134ff3c332f" ma:index="13" nillable="true" ma:taxonomy="true" ma:internalName="lcf76f155ced4ddcb4097134ff3c332f" ma:taxonomyFieldName="MediaServiceImageTags" ma:displayName="Značky obrázků" ma:readOnly="false" ma:fieldId="{5cf76f15-5ced-4ddc-b409-7134ff3c332f}" ma:taxonomyMulti="true" ma:sspId="ebb97977-59de-4a56-a93a-a55cc960f67b" ma:termSetId="09814cd3-568e-fe90-9814-8d621ff8fb84" ma:anchorId="fba54fb3-c3e1-fe81-a776-ca4b69148c4d" ma:open="true" ma:isKeyword="false">
+      <xsd:complexType>
+        <xsd:sequence>
+          <xsd:element ref="pc:Terms" minOccurs="0" maxOccurs="1"/>
+        </xsd:sequence>
+      </xsd:complexType>
+    </xsd:element>
+    <xsd:element name="MediaServiceGenerationTime" ma:index="15" nillable="true" ma:displayName="MediaServiceGenerationTime" ma:hidden="true" ma:internalName="MediaServiceGenerationTime" ma:readOnly="true">
+      <xsd:simpleType>
+        <xsd:restriction base="dms:Text"/>
+      </xsd:simpleType>
+    </xsd:element>
+    <xsd:element name="MediaServiceEventHashCode" ma:index="16" nillable="true" ma:displayName="MediaServiceEventHashCode" ma:hidden="true" ma:internalName="MediaServiceEventHashCode" ma:readOnly="true">
+      <xsd:simpleType>
+        <xsd:restriction base="dms:Text"/>
+      </xsd:simpleType>
+    </xsd:element>
+  </xsd:schema>
+  <xsd:schema xmlns:xsd="http://www.w3.org/2001/XMLSchema" xmlns:xs="http://www.w3.org/2001/XMLSchema" xmlns:dms="http://schemas.microsoft.com/office/2006/documentManagement/types" xmlns:pc="http://schemas.microsoft.com/office/infopath/2007/PartnerControls" targetNamespace="3eb61919-e7f8-4a11-8db4-9145fbd21da9" elementFormDefault="qualified">
+    <xsd:import namespace="http://schemas.microsoft.com/office/2006/documentManagement/types"/>
+    <xsd:import namespace="http://schemas.microsoft.com/office/infopath/2007/PartnerControls"/>
+    <xsd:element name="TaxCatchAll" ma:index="14" nillable="true" ma:displayName="Taxonomy Catch All Column" ma:hidden="true" ma:list="{b81dadd1-d650-44b3-88bb-a397f6058a88}" ma:internalName="TaxCatchAll" ma:showField="CatchAllData" ma:web="3eb61919-e7f8-4a11-8db4-9145fbd21da9">
+      <xsd:complexType>
+        <xsd:complexContent>
+          <xsd:extension base="dms:MultiChoiceLookup">
+            <xsd:sequence>
+              <xsd:element name="Value" type="dms:Lookup" maxOccurs="unbounded" minOccurs="0" nillable="true"/>
+            </xsd:sequence>
+          </xsd:extension>
+        </xsd:complexContent>
+      </xsd:complexType>
     </xsd:element>
   </xsd:schema>
   <xsd:schema xmlns="http://schemas.openxmlformats.org/package/2006/metadata/core-properties" xmlns:xsd="http://www.w3.org/2001/XMLSchema" xmlns:xsi="http://www.w3.org/2001/XMLSchema-instance" xmlns:dc="http://purl.org/dc/elements/1.1/" xmlns:dcterms="http://purl.org/dc/terms/" xmlns:odoc="http://schemas.microsoft.com/internal/obd" targetNamespace="http://schemas.openxmlformats.org/package/2006/metadata/core-properties" elementFormDefault="qualified" attributeFormDefault="unqualified" blockDefault="#all">
@@ -8454,19 +7852,5 @@
 </file>
 
 <file path=customXml/itemProps3.xml><?xml version="1.0" encoding="utf-8"?>
-<ds:datastoreItem xmlns:ds="http://schemas.openxmlformats.org/officeDocument/2006/customXml" ds:itemID="{6E1A1E91-5587-4A77-9773-CA5195CF7C07}">
-  <ds:schemaRefs>
-    <ds:schemaRef ds:uri="http://schemas.microsoft.com/office/2006/metadata/contentType"/>
-    <ds:schemaRef ds:uri="http://schemas.microsoft.com/office/2006/metadata/properties/metaAttributes"/>
-    <ds:schemaRef ds:uri="http://www.w3.org/2001/XMLSchema"/>
-    <ds:schemaRef ds:uri="http://schemas.microsoft.com/office/2006/metadata/properties"/>
-    <ds:schemaRef ds:uri="09a37b55-a4d7-45bd-a73f-33c2b1d41898"/>
-    <ds:schemaRef ds:uri="http://schemas.microsoft.com/office/2006/documentManagement/types"/>
-    <ds:schemaRef ds:uri="http://schemas.microsoft.com/office/infopath/2007/PartnerControls"/>
-    <ds:schemaRef ds:uri="http://schemas.openxmlformats.org/package/2006/metadata/core-properties"/>
-    <ds:schemaRef ds:uri="http://purl.org/dc/elements/1.1/"/>
-    <ds:schemaRef ds:uri="http://purl.org/dc/terms/"/>
-    <ds:schemaRef ds:uri="http://schemas.microsoft.com/internal/obd"/>
-  </ds:schemaRefs>
-</ds:datastoreItem>
+<ds:datastoreItem xmlns:ds="http://schemas.openxmlformats.org/officeDocument/2006/customXml" ds:itemID="{72ED6CEA-E4E5-402C-8F4F-CFC4A5A2EF7C}"/>
 </file>